--- a/labs/2 курс/3.2.4+5/3.2.4 + 3.2.5 Колебания в контуре v3.pptx
+++ b/labs/2 курс/3.2.4+5/3.2.4 + 3.2.5 Колебания в контуре v3.pptx
@@ -687,10 +687,8 @@
           <a:lstStyle/>
           <a:p>
             <a:r>
-              <a:rPr lang="en-US" dirty="0"/>
-              <a:t>Итак. Первое — у контура есть собственная ёмкость около нанофарады, и без неё ни период, ни резонансная частота не сходятся с теорией. Второе — критическое сопротивление по наклону графика 7,8 ± 1,3 кОм, совпадает с расчётом. Третье — все экспериментальные методы дают согласованную добротность, и она обратно пропорциональна сопротивлению. Четвёртое — реальные потери в контуре на 15–20 % больше, чем дают сопротивление магазина и катушки. Спасибо, готов ответить на вопросы.</a:t>
+              <a:t>Итак. Первое — у контура есть собственная ёмкость около нанофарады, без неё ни период, ни резонансная частота с теорией не сходятся; на резонансе сдвиг фаз 86°, близко к 90°. Второе — декремент растёт с сопротивлением как в теории, критическое сопротивление по графику 7,8 ± 1,3 кОм совпадает с расчётом, подбор на экране его занижает. Третье — все методы дают согласованную добротность, и она обратно пропорциональна сопротивлению. Четвёртое — по всем методам добротность на 15–20 % ниже расчётной: на 6 кГц потери больше, чем даёт сопротивление катушки, измеренное на 1,5 кГц. Спасибо, готов ответить на вопросы.</a:t>
             </a:r>
-            <a:endParaRPr lang="en-US" dirty="0"/>
           </a:p>
         </p:txBody>
       </p:sp>
@@ -1039,10 +1037,8 @@
           <a:lstStyle/>
           <a:p>
             <a:r>
-              <a:rPr lang="en-US" dirty="0"/>
-              <a:t>Ёмкость выставили под собственную частоту 6,5 кГц, на магазине 5,76 нФ. Первый всплеск на осциллограмме — это сам импульс генератора, во время него колебания вынужденные, поэтому отсчёт ведём от первого максимума после импульса. Декремент — по двум максимумам через n периодов, добротность — π/Θ. С ростом R декремент растёт, добротность падает. Но при малых R декремент выходит на полку около 0,22 и дальше не уменьшается: в контуре есть потери, которые от R не зависят.</a:t>
+              <a:t>Ёмкость выставили под собственную частоту 6,5 кГц, на магазине 5,76 нФ. Сопротивление брали от 0,21 до 0,41 кОм. Нулевой пик сразу после импульса искажён: пока идёт импульс, колебания вынужденные. Поэтому первый курсор ставили на следующий, ровный максимум, второй — на максимум через n периодов, n от 2 до 4. Нижний курсор стоит на нулевой линии. Декремент — логарифм отношения амплитуд, делённый на n, добротность — π/Θ. Погрешность амплитуды берём 16 мВ: это точность, с которой курсор попадает на вершину пика, линия толстая, а вершина плоская. Шаг самого курсора, 2 мВ, меньше. В пределах этой погрешности декремент совпадает с теорией, отклонения в разные стороны — систематики не видно.</a:t>
             </a:r>
-            <a:endParaRPr lang="en-US" dirty="0"/>
           </a:p>
         </p:txBody>
       </p:sp>
@@ -1127,10 +1123,8 @@
           <a:lstStyle/>
           <a:p>
             <a:r>
-              <a:rPr lang="en-US" dirty="0"/>
-              <a:t>Из связи декремента с сопротивлением следует линейная зависимость 1/Θ² от 1/R², наклон даёт критическое сопротивление. Точки — декременты с прошлого слайда. Ошибку отсчёта амплитуды берём как половину толщины линии луча, 16 мВ: курсор ставится на середину линии. Погрешность 1/Θ² пропорциональна ΔΘ/Θ³, поэтому при малых декрементах кресты большие. Все точки ложатся на прямую в пределах погрешности. Наклон даёт 7,8 ± 1,3 кОм, расчёт с учётом собственной ёмкости 7,65 — совпадение. Без учёта собственной ёмкости было бы 8,16. Подбор на экране даёт меньше, 6,1, потому что около Rкр последний выброс сливается с линией.</a:t>
+              <a:t>Из связи декремента с сопротивлением следует линейная зависимость 1/Θ² от 1/R², наклон даёт критическое сопротивление. Точки — декременты с прошлого слайда. Погрешность 1/Θ² пропорциональна ΔΘ/Θ³, поэтому при малых декрементах кресты большие. Разброс заметный, потому что сопротивления взяты в узком диапазоне, 0,03–0,05 Rкр, а по методичке нужно 0,05–0,25: декремент меняется всего вдвое, и ошибка отсчёта сравнима с самим эффектом. В пределах погрешности точки на прямой. Наклон даёт 7,8 ± 1,3 кОм, расчёт с учётом собственной ёмкости — 7,65, совпадает. Без собственной ёмкости было бы 8,16. Подбор на экране даёт меньше, 6,1: около Rкр последний выброс сливается с линией и пропадает раньше.</a:t>
             </a:r>
-            <a:endParaRPr lang="en-US" dirty="0"/>
           </a:p>
         </p:txBody>
       </p:sp>
@@ -1303,10 +1297,8 @@
           <a:lstStyle/>
           <a:p>
             <a:r>
-              <a:rPr lang="en-US" dirty="0"/>
-              <a:t>Теперь вынужденные колебания. Резонансные кривые сняты при двух сопротивлениях, 0,41 и 0,20 кОм. Точки аппроксимированы резонансной кривой с тремя параметрами. Вдвое большее сопротивление даёт вдвое более широкую кривую: добротность 7,1 против 14,4. Резонанс оказался на 6,1 кГц, а не на рассчитанных 6,5 — это собственная ёмкость: с её учётом расчёт даёт 6,09 кГц, совпадение 0,3 %.</a:t>
+              <a:t>Теперь вынужденные колебания. Подавали синус, резонанс нашли по максимуму амплитуды, потом шли по частоте в обе стороны и курсором снимали амплитуду. Кривые сняты при 0,41 и 0,20 кОм, точки аппроксимированы резонансной кривой. Ширина на уровне 1/√2 равна 2γ, поэтому Q = ν0/2Δν. Вдвое большее сопротивление даёт вдвое более широкую кривую: добротность 7,1 против 14,4. Резонанс оказался на 6,1 кГц, а не на 6,5 — это собственная ёмкость, с ней расчёт даёт 6,09. Ещё на резонансе осциллограф показал задержку между напряжением на конденсаторе и сигналом генератора 39 мкс, это 86°, по теории 90°. Полную ФЧХ не снимали.</a:t>
             </a:r>
-            <a:endParaRPr lang="en-US" dirty="0"/>
           </a:p>
         </p:txBody>
       </p:sp>
@@ -1391,10 +1383,8 @@
           <a:lstStyle/>
           <a:p>
             <a:r>
-              <a:rPr lang="en-US" dirty="0"/>
-              <a:t>На контур подаются цуги — отрезки синусоиды по 15 периодов. На резонансе амплитуда нарастает к установившемуся значению по закону 1 − e^(−γt), поэтому ln(U0 − Uk) падает линейно с номером периода, наклон даёт декремент: 0,31 и 0,21. При отстройке от резонанса в начале цуга видны биения: складываются вынужденные колебания на частоте генератора и затухающие собственные на частоте ν0, огибающая пульсирует с разностной частотой около 0,8 кГц, пока собственные колебания не затухнут.</a:t>
+              <a:t>На контур подаются цуги — отрезки синусоиды по 15 периодов на резонансной частоте. Курсором снимали установившуюся амплитуду U0 и амплитуды на k-м периоде нарастания. Амплитуда растёт как 1 − e^(−γt), поэтому ln(U0 − Uk) падает линейно с номером периода, наклон даёт декремент: 0,31 и 0,21. При отстройке от резонанса в начале цуга видны биения: складываются вынужденные колебания на частоте генератора и затухающие собственные на ν0, огибающая пульсирует с разностной частотой, пока собственные не затухнут.</a:t>
             </a:r>
-            <a:endParaRPr lang="en-US" dirty="0"/>
           </a:p>
         </p:txBody>
       </p:sp>
